--- a/stem_cell_seasonality/output/Natural_Experiment_Figure.pptx
+++ b/stem_cell_seasonality/output/Natural_Experiment_Figure.pptx
@@ -3112,7 +3112,7 @@
           <a:p>
             <a:r>
               <a:rPr sz="1600" b="1"/>
-              <a:t>Figure 3. Natural Experiment: Academic Calendar vs Biological Seasonality</a:t>
+              <a:t>Figure 1. Natural Experiment: Academic Calendar vs Biological Seasonality</a:t>
             </a:r>
           </a:p>
         </p:txBody>
@@ -3165,7 +3165,7 @@
           <a:p>
             <a:r>
               <a:rPr sz="1000"/>
-              <a:t>Geographic variation in academic year start months used as instrument. Japan/Korea (April, n=250), USA/EU/CN (Sep/Oct, n=2825), Australia/NZ/BR (Jan/Feb, SH, n=83). Japan shows significant March peak (p=0.0006); USA/EU shows no significant seasonality.</a:t>
+              <a:t>Geographic variation in academic year start months used as natural experiment. Japan/Korea (Mar/Apr, n=250): significant March peak (p=0.0006). USA/EU/CN (Sep/Oct, n=2,825): no significant seasonality. Sensitivity: removing Japan eliminates March peak from full dataset.</a:t>
             </a:r>
           </a:p>
         </p:txBody>
